--- a/public/videos/repositories/trip-route-stay/trip-route-stay-tech-preview.pptx
+++ b/public/videos/repositories/trip-route-stay/trip-route-stay-tech-preview.pptx
@@ -134,7 +134,7 @@
           <p:cNvPr id="2" name="タイトル 1">
             <a:extLst>
               <a:ext uri="{FF2B5EF4-FFF2-40B4-BE49-F238E27FC236}">
-                <a16:creationId xmlns:a16="http://schemas.microsoft.com/office/drawing/2014/main" id="{3432D8AB-E05C-386E-AE2F-988303C617C1}"/>
+                <a16:creationId xmlns:a16="http://schemas.microsoft.com/office/drawing/2014/main" id="{7989301C-70ED-F2B4-42A7-453763759483}"/>
               </a:ext>
             </a:extLst>
           </p:cNvPr>
@@ -171,7 +171,7 @@
           <p:cNvPr id="3" name="字幕 2">
             <a:extLst>
               <a:ext uri="{FF2B5EF4-FFF2-40B4-BE49-F238E27FC236}">
-                <a16:creationId xmlns:a16="http://schemas.microsoft.com/office/drawing/2014/main" id="{29B5038B-06EE-5226-60BF-68554C248FA4}"/>
+                <a16:creationId xmlns:a16="http://schemas.microsoft.com/office/drawing/2014/main" id="{84C0D0E6-B065-CE83-A796-988A26CD55F2}"/>
               </a:ext>
             </a:extLst>
           </p:cNvPr>
@@ -241,7 +241,7 @@
           <p:cNvPr id="4" name="日付プレースホルダー 3">
             <a:extLst>
               <a:ext uri="{FF2B5EF4-FFF2-40B4-BE49-F238E27FC236}">
-                <a16:creationId xmlns:a16="http://schemas.microsoft.com/office/drawing/2014/main" id="{C3145F5D-C5CC-C87F-DF28-8A16B16D13A6}"/>
+                <a16:creationId xmlns:a16="http://schemas.microsoft.com/office/drawing/2014/main" id="{AE001358-2FBF-92B7-7ADC-90DF8E81FEB8}"/>
               </a:ext>
             </a:extLst>
           </p:cNvPr>
@@ -257,7 +257,7 @@
           <a:bodyPr/>
           <a:lstStyle/>
           <a:p>
-            <a:fld id="{77CCEE70-C42D-47A9-9950-FBF129698958}" type="datetimeFigureOut">
+            <a:fld id="{107415FD-A605-4415-8531-A4493AFFD1C7}" type="datetimeFigureOut">
               <a:rPr kumimoji="1" lang="ja-JP" altLang="en-US" smtClean="0"/>
               <a:t>2026/7/30</a:t>
             </a:fld>
@@ -270,7 +270,7 @@
           <p:cNvPr id="5" name="フッター プレースホルダー 4">
             <a:extLst>
               <a:ext uri="{FF2B5EF4-FFF2-40B4-BE49-F238E27FC236}">
-                <a16:creationId xmlns:a16="http://schemas.microsoft.com/office/drawing/2014/main" id="{7479B00A-BA1C-16DA-7CF8-A30BC9B19F11}"/>
+                <a16:creationId xmlns:a16="http://schemas.microsoft.com/office/drawing/2014/main" id="{BF08468D-B5F3-8DC7-6588-163D2461DD8A}"/>
               </a:ext>
             </a:extLst>
           </p:cNvPr>
@@ -295,7 +295,7 @@
           <p:cNvPr id="6" name="スライド番号プレースホルダー 5">
             <a:extLst>
               <a:ext uri="{FF2B5EF4-FFF2-40B4-BE49-F238E27FC236}">
-                <a16:creationId xmlns:a16="http://schemas.microsoft.com/office/drawing/2014/main" id="{49ABF641-E5AD-8EB9-0538-DBC15DCCA7C6}"/>
+                <a16:creationId xmlns:a16="http://schemas.microsoft.com/office/drawing/2014/main" id="{CD6C902B-356D-DA5E-5DAA-51C309FD42EC}"/>
               </a:ext>
             </a:extLst>
           </p:cNvPr>
@@ -311,7 +311,7 @@
           <a:bodyPr/>
           <a:lstStyle/>
           <a:p>
-            <a:fld id="{FC6E36EE-07AC-4E8E-821C-E8430B7C36EE}" type="slidenum">
+            <a:fld id="{3F0E1A20-1AFA-483B-A474-9995A141C2E4}" type="slidenum">
               <a:rPr kumimoji="1" lang="ja-JP" altLang="en-US" smtClean="0"/>
               <a:t>‹#›</a:t>
             </a:fld>
@@ -322,7 +322,7 @@
     </p:spTree>
     <p:extLst>
       <p:ext uri="{BB962C8B-B14F-4D97-AF65-F5344CB8AC3E}">
-        <p14:creationId xmlns:p14="http://schemas.microsoft.com/office/powerpoint/2010/main" val="2494839463"/>
+        <p14:creationId xmlns:p14="http://schemas.microsoft.com/office/powerpoint/2010/main" val="2611518271"/>
       </p:ext>
     </p:extLst>
   </p:cSld>
@@ -354,7 +354,7 @@
           <p:cNvPr id="2" name="タイトル 1">
             <a:extLst>
               <a:ext uri="{FF2B5EF4-FFF2-40B4-BE49-F238E27FC236}">
-                <a16:creationId xmlns:a16="http://schemas.microsoft.com/office/drawing/2014/main" id="{3228A5D7-4C5E-46A0-741D-060E66499F8F}"/>
+                <a16:creationId xmlns:a16="http://schemas.microsoft.com/office/drawing/2014/main" id="{F808D388-4C62-1024-760A-C546A5B661C2}"/>
               </a:ext>
             </a:extLst>
           </p:cNvPr>
@@ -382,7 +382,7 @@
           <p:cNvPr id="3" name="縦書きテキスト プレースホルダー 2">
             <a:extLst>
               <a:ext uri="{FF2B5EF4-FFF2-40B4-BE49-F238E27FC236}">
-                <a16:creationId xmlns:a16="http://schemas.microsoft.com/office/drawing/2014/main" id="{971FCA5F-8FBF-932C-0F56-3D2057AF3A4D}"/>
+                <a16:creationId xmlns:a16="http://schemas.microsoft.com/office/drawing/2014/main" id="{6DFEC567-6411-CC72-7D7F-439490470FD3}"/>
               </a:ext>
             </a:extLst>
           </p:cNvPr>
@@ -471,7 +471,7 @@
           <p:cNvPr id="4" name="日付プレースホルダー 3">
             <a:extLst>
               <a:ext uri="{FF2B5EF4-FFF2-40B4-BE49-F238E27FC236}">
-                <a16:creationId xmlns:a16="http://schemas.microsoft.com/office/drawing/2014/main" id="{425C5909-F1A4-E0AA-ACFB-2910151E04C5}"/>
+                <a16:creationId xmlns:a16="http://schemas.microsoft.com/office/drawing/2014/main" id="{44C38B35-B37D-751B-358C-C73515B2912A}"/>
               </a:ext>
             </a:extLst>
           </p:cNvPr>
@@ -487,7 +487,7 @@
           <a:bodyPr/>
           <a:lstStyle/>
           <a:p>
-            <a:fld id="{77CCEE70-C42D-47A9-9950-FBF129698958}" type="datetimeFigureOut">
+            <a:fld id="{107415FD-A605-4415-8531-A4493AFFD1C7}" type="datetimeFigureOut">
               <a:rPr kumimoji="1" lang="ja-JP" altLang="en-US" smtClean="0"/>
               <a:t>2026/7/30</a:t>
             </a:fld>
@@ -500,7 +500,7 @@
           <p:cNvPr id="5" name="フッター プレースホルダー 4">
             <a:extLst>
               <a:ext uri="{FF2B5EF4-FFF2-40B4-BE49-F238E27FC236}">
-                <a16:creationId xmlns:a16="http://schemas.microsoft.com/office/drawing/2014/main" id="{259093BC-6F20-33D3-EFE1-F9B2E6AF6ED4}"/>
+                <a16:creationId xmlns:a16="http://schemas.microsoft.com/office/drawing/2014/main" id="{E301FCE9-9ADF-45F7-24BF-19368EC90DB0}"/>
               </a:ext>
             </a:extLst>
           </p:cNvPr>
@@ -525,7 +525,7 @@
           <p:cNvPr id="6" name="スライド番号プレースホルダー 5">
             <a:extLst>
               <a:ext uri="{FF2B5EF4-FFF2-40B4-BE49-F238E27FC236}">
-                <a16:creationId xmlns:a16="http://schemas.microsoft.com/office/drawing/2014/main" id="{F361E517-959C-1778-CA16-BF0696496E3D}"/>
+                <a16:creationId xmlns:a16="http://schemas.microsoft.com/office/drawing/2014/main" id="{FF7E3B99-6730-DA00-55D9-A3DBDB69E565}"/>
               </a:ext>
             </a:extLst>
           </p:cNvPr>
@@ -541,7 +541,7 @@
           <a:bodyPr/>
           <a:lstStyle/>
           <a:p>
-            <a:fld id="{FC6E36EE-07AC-4E8E-821C-E8430B7C36EE}" type="slidenum">
+            <a:fld id="{3F0E1A20-1AFA-483B-A474-9995A141C2E4}" type="slidenum">
               <a:rPr kumimoji="1" lang="ja-JP" altLang="en-US" smtClean="0"/>
               <a:t>‹#›</a:t>
             </a:fld>
@@ -552,7 +552,7 @@
     </p:spTree>
     <p:extLst>
       <p:ext uri="{BB962C8B-B14F-4D97-AF65-F5344CB8AC3E}">
-        <p14:creationId xmlns:p14="http://schemas.microsoft.com/office/powerpoint/2010/main" val="1125801586"/>
+        <p14:creationId xmlns:p14="http://schemas.microsoft.com/office/powerpoint/2010/main" val="2050074121"/>
       </p:ext>
     </p:extLst>
   </p:cSld>
@@ -584,7 +584,7 @@
           <p:cNvPr id="2" name="縦書きタイトル 1">
             <a:extLst>
               <a:ext uri="{FF2B5EF4-FFF2-40B4-BE49-F238E27FC236}">
-                <a16:creationId xmlns:a16="http://schemas.microsoft.com/office/drawing/2014/main" id="{D1AE7480-47C9-C994-22F2-0F2E7F7C53A0}"/>
+                <a16:creationId xmlns:a16="http://schemas.microsoft.com/office/drawing/2014/main" id="{BB579A1C-A0EC-A32B-7D7C-F441092E3F56}"/>
               </a:ext>
             </a:extLst>
           </p:cNvPr>
@@ -617,7 +617,7 @@
           <p:cNvPr id="3" name="縦書きテキスト プレースホルダー 2">
             <a:extLst>
               <a:ext uri="{FF2B5EF4-FFF2-40B4-BE49-F238E27FC236}">
-                <a16:creationId xmlns:a16="http://schemas.microsoft.com/office/drawing/2014/main" id="{40CEA5A2-C5AE-A9EF-0E38-5A4A409FB2D4}"/>
+                <a16:creationId xmlns:a16="http://schemas.microsoft.com/office/drawing/2014/main" id="{EAEEB814-47A3-5FB7-6827-194D5B6490C7}"/>
               </a:ext>
             </a:extLst>
           </p:cNvPr>
@@ -711,7 +711,7 @@
           <p:cNvPr id="4" name="日付プレースホルダー 3">
             <a:extLst>
               <a:ext uri="{FF2B5EF4-FFF2-40B4-BE49-F238E27FC236}">
-                <a16:creationId xmlns:a16="http://schemas.microsoft.com/office/drawing/2014/main" id="{87FFF797-FC8A-C625-F241-22ADC19D3096}"/>
+                <a16:creationId xmlns:a16="http://schemas.microsoft.com/office/drawing/2014/main" id="{B95A5B7E-81E3-C008-E967-E4214034415B}"/>
               </a:ext>
             </a:extLst>
           </p:cNvPr>
@@ -727,7 +727,7 @@
           <a:bodyPr/>
           <a:lstStyle/>
           <a:p>
-            <a:fld id="{77CCEE70-C42D-47A9-9950-FBF129698958}" type="datetimeFigureOut">
+            <a:fld id="{107415FD-A605-4415-8531-A4493AFFD1C7}" type="datetimeFigureOut">
               <a:rPr kumimoji="1" lang="ja-JP" altLang="en-US" smtClean="0"/>
               <a:t>2026/7/30</a:t>
             </a:fld>
@@ -740,7 +740,7 @@
           <p:cNvPr id="5" name="フッター プレースホルダー 4">
             <a:extLst>
               <a:ext uri="{FF2B5EF4-FFF2-40B4-BE49-F238E27FC236}">
-                <a16:creationId xmlns:a16="http://schemas.microsoft.com/office/drawing/2014/main" id="{ACDA4EEE-6139-55B5-F602-6F97A950C6F9}"/>
+                <a16:creationId xmlns:a16="http://schemas.microsoft.com/office/drawing/2014/main" id="{85EBD346-EE9B-E7D9-311A-A26088E0C0AC}"/>
               </a:ext>
             </a:extLst>
           </p:cNvPr>
@@ -765,7 +765,7 @@
           <p:cNvPr id="6" name="スライド番号プレースホルダー 5">
             <a:extLst>
               <a:ext uri="{FF2B5EF4-FFF2-40B4-BE49-F238E27FC236}">
-                <a16:creationId xmlns:a16="http://schemas.microsoft.com/office/drawing/2014/main" id="{998A50BC-D77E-36CE-8C51-68B234F5D1A9}"/>
+                <a16:creationId xmlns:a16="http://schemas.microsoft.com/office/drawing/2014/main" id="{9A40388C-FE3C-2989-6E7D-C2AE11994C34}"/>
               </a:ext>
             </a:extLst>
           </p:cNvPr>
@@ -781,7 +781,7 @@
           <a:bodyPr/>
           <a:lstStyle/>
           <a:p>
-            <a:fld id="{FC6E36EE-07AC-4E8E-821C-E8430B7C36EE}" type="slidenum">
+            <a:fld id="{3F0E1A20-1AFA-483B-A474-9995A141C2E4}" type="slidenum">
               <a:rPr kumimoji="1" lang="ja-JP" altLang="en-US" smtClean="0"/>
               <a:t>‹#›</a:t>
             </a:fld>
@@ -792,7 +792,7 @@
     </p:spTree>
     <p:extLst>
       <p:ext uri="{BB962C8B-B14F-4D97-AF65-F5344CB8AC3E}">
-        <p14:creationId xmlns:p14="http://schemas.microsoft.com/office/powerpoint/2010/main" val="2503190759"/>
+        <p14:creationId xmlns:p14="http://schemas.microsoft.com/office/powerpoint/2010/main" val="173750102"/>
       </p:ext>
     </p:extLst>
   </p:cSld>
@@ -824,7 +824,7 @@
           <p:cNvPr id="2" name="タイトル 1">
             <a:extLst>
               <a:ext uri="{FF2B5EF4-FFF2-40B4-BE49-F238E27FC236}">
-                <a16:creationId xmlns:a16="http://schemas.microsoft.com/office/drawing/2014/main" id="{16D88ABF-366A-4CBB-3561-56D48FE4FA10}"/>
+                <a16:creationId xmlns:a16="http://schemas.microsoft.com/office/drawing/2014/main" id="{326981C2-E60F-AAFA-A730-B486920EF8F4}"/>
               </a:ext>
             </a:extLst>
           </p:cNvPr>
@@ -852,7 +852,7 @@
           <p:cNvPr id="3" name="コンテンツ プレースホルダー 2">
             <a:extLst>
               <a:ext uri="{FF2B5EF4-FFF2-40B4-BE49-F238E27FC236}">
-                <a16:creationId xmlns:a16="http://schemas.microsoft.com/office/drawing/2014/main" id="{20BAE159-47CA-5814-C74E-0E0BE8070C38}"/>
+                <a16:creationId xmlns:a16="http://schemas.microsoft.com/office/drawing/2014/main" id="{956CA141-08ED-D703-CE7A-0A0F5867BE5A}"/>
               </a:ext>
             </a:extLst>
           </p:cNvPr>
@@ -941,7 +941,7 @@
           <p:cNvPr id="4" name="日付プレースホルダー 3">
             <a:extLst>
               <a:ext uri="{FF2B5EF4-FFF2-40B4-BE49-F238E27FC236}">
-                <a16:creationId xmlns:a16="http://schemas.microsoft.com/office/drawing/2014/main" id="{84BD34C1-D0D6-2822-D2EC-57F708959C60}"/>
+                <a16:creationId xmlns:a16="http://schemas.microsoft.com/office/drawing/2014/main" id="{2BED78A5-9685-E984-A700-ADCEE22CDCBD}"/>
               </a:ext>
             </a:extLst>
           </p:cNvPr>
@@ -957,7 +957,7 @@
           <a:bodyPr/>
           <a:lstStyle/>
           <a:p>
-            <a:fld id="{77CCEE70-C42D-47A9-9950-FBF129698958}" type="datetimeFigureOut">
+            <a:fld id="{107415FD-A605-4415-8531-A4493AFFD1C7}" type="datetimeFigureOut">
               <a:rPr kumimoji="1" lang="ja-JP" altLang="en-US" smtClean="0"/>
               <a:t>2026/7/30</a:t>
             </a:fld>
@@ -970,7 +970,7 @@
           <p:cNvPr id="5" name="フッター プレースホルダー 4">
             <a:extLst>
               <a:ext uri="{FF2B5EF4-FFF2-40B4-BE49-F238E27FC236}">
-                <a16:creationId xmlns:a16="http://schemas.microsoft.com/office/drawing/2014/main" id="{861C3E4E-1886-3DB4-1BB2-F85E74321B97}"/>
+                <a16:creationId xmlns:a16="http://schemas.microsoft.com/office/drawing/2014/main" id="{78769EBB-F225-8BEE-7125-B0DF0F23446E}"/>
               </a:ext>
             </a:extLst>
           </p:cNvPr>
@@ -995,7 +995,7 @@
           <p:cNvPr id="6" name="スライド番号プレースホルダー 5">
             <a:extLst>
               <a:ext uri="{FF2B5EF4-FFF2-40B4-BE49-F238E27FC236}">
-                <a16:creationId xmlns:a16="http://schemas.microsoft.com/office/drawing/2014/main" id="{DA77CCCC-1DFE-A142-1384-73A3BC38E8C8}"/>
+                <a16:creationId xmlns:a16="http://schemas.microsoft.com/office/drawing/2014/main" id="{E6A51BE3-7AE8-BE4F-DF97-E2B6AA665EAB}"/>
               </a:ext>
             </a:extLst>
           </p:cNvPr>
@@ -1011,7 +1011,7 @@
           <a:bodyPr/>
           <a:lstStyle/>
           <a:p>
-            <a:fld id="{FC6E36EE-07AC-4E8E-821C-E8430B7C36EE}" type="slidenum">
+            <a:fld id="{3F0E1A20-1AFA-483B-A474-9995A141C2E4}" type="slidenum">
               <a:rPr kumimoji="1" lang="ja-JP" altLang="en-US" smtClean="0"/>
               <a:t>‹#›</a:t>
             </a:fld>
@@ -1022,7 +1022,7 @@
     </p:spTree>
     <p:extLst>
       <p:ext uri="{BB962C8B-B14F-4D97-AF65-F5344CB8AC3E}">
-        <p14:creationId xmlns:p14="http://schemas.microsoft.com/office/powerpoint/2010/main" val="841019217"/>
+        <p14:creationId xmlns:p14="http://schemas.microsoft.com/office/powerpoint/2010/main" val="4235670720"/>
       </p:ext>
     </p:extLst>
   </p:cSld>
@@ -1054,7 +1054,7 @@
           <p:cNvPr id="2" name="タイトル 1">
             <a:extLst>
               <a:ext uri="{FF2B5EF4-FFF2-40B4-BE49-F238E27FC236}">
-                <a16:creationId xmlns:a16="http://schemas.microsoft.com/office/drawing/2014/main" id="{15588B77-80E0-E20F-D54B-C5F9FEB78C06}"/>
+                <a16:creationId xmlns:a16="http://schemas.microsoft.com/office/drawing/2014/main" id="{DE228C39-8C25-5960-D250-11EAD0A7F1E4}"/>
               </a:ext>
             </a:extLst>
           </p:cNvPr>
@@ -1091,7 +1091,7 @@
           <p:cNvPr id="3" name="テキスト プレースホルダー 2">
             <a:extLst>
               <a:ext uri="{FF2B5EF4-FFF2-40B4-BE49-F238E27FC236}">
-                <a16:creationId xmlns:a16="http://schemas.microsoft.com/office/drawing/2014/main" id="{3E40900D-0680-F1F6-4A0E-50E28A55D1EE}"/>
+                <a16:creationId xmlns:a16="http://schemas.microsoft.com/office/drawing/2014/main" id="{F4DAC9D7-186C-1CA3-5F4D-884EC0143E04}"/>
               </a:ext>
             </a:extLst>
           </p:cNvPr>
@@ -1216,7 +1216,7 @@
           <p:cNvPr id="4" name="日付プレースホルダー 3">
             <a:extLst>
               <a:ext uri="{FF2B5EF4-FFF2-40B4-BE49-F238E27FC236}">
-                <a16:creationId xmlns:a16="http://schemas.microsoft.com/office/drawing/2014/main" id="{66DF5428-5097-3C9F-E6DE-0805D7B643B4}"/>
+                <a16:creationId xmlns:a16="http://schemas.microsoft.com/office/drawing/2014/main" id="{1C9F0694-09CB-0EA5-6623-4D77512A0F35}"/>
               </a:ext>
             </a:extLst>
           </p:cNvPr>
@@ -1232,7 +1232,7 @@
           <a:bodyPr/>
           <a:lstStyle/>
           <a:p>
-            <a:fld id="{77CCEE70-C42D-47A9-9950-FBF129698958}" type="datetimeFigureOut">
+            <a:fld id="{107415FD-A605-4415-8531-A4493AFFD1C7}" type="datetimeFigureOut">
               <a:rPr kumimoji="1" lang="ja-JP" altLang="en-US" smtClean="0"/>
               <a:t>2026/7/30</a:t>
             </a:fld>
@@ -1245,7 +1245,7 @@
           <p:cNvPr id="5" name="フッター プレースホルダー 4">
             <a:extLst>
               <a:ext uri="{FF2B5EF4-FFF2-40B4-BE49-F238E27FC236}">
-                <a16:creationId xmlns:a16="http://schemas.microsoft.com/office/drawing/2014/main" id="{E4D4050D-075F-BBDF-23E8-B14C090E1A7D}"/>
+                <a16:creationId xmlns:a16="http://schemas.microsoft.com/office/drawing/2014/main" id="{3A321631-9B4D-EF03-DC76-9586AE2788A8}"/>
               </a:ext>
             </a:extLst>
           </p:cNvPr>
@@ -1270,7 +1270,7 @@
           <p:cNvPr id="6" name="スライド番号プレースホルダー 5">
             <a:extLst>
               <a:ext uri="{FF2B5EF4-FFF2-40B4-BE49-F238E27FC236}">
-                <a16:creationId xmlns:a16="http://schemas.microsoft.com/office/drawing/2014/main" id="{61D6494D-A4C3-00E4-C5EA-ADD434F4B535}"/>
+                <a16:creationId xmlns:a16="http://schemas.microsoft.com/office/drawing/2014/main" id="{13CD337E-695F-9231-90FF-8CCE9CBEAC76}"/>
               </a:ext>
             </a:extLst>
           </p:cNvPr>
@@ -1286,7 +1286,7 @@
           <a:bodyPr/>
           <a:lstStyle/>
           <a:p>
-            <a:fld id="{FC6E36EE-07AC-4E8E-821C-E8430B7C36EE}" type="slidenum">
+            <a:fld id="{3F0E1A20-1AFA-483B-A474-9995A141C2E4}" type="slidenum">
               <a:rPr kumimoji="1" lang="ja-JP" altLang="en-US" smtClean="0"/>
               <a:t>‹#›</a:t>
             </a:fld>
@@ -1297,7 +1297,7 @@
     </p:spTree>
     <p:extLst>
       <p:ext uri="{BB962C8B-B14F-4D97-AF65-F5344CB8AC3E}">
-        <p14:creationId xmlns:p14="http://schemas.microsoft.com/office/powerpoint/2010/main" val="2902927425"/>
+        <p14:creationId xmlns:p14="http://schemas.microsoft.com/office/powerpoint/2010/main" val="2126309651"/>
       </p:ext>
     </p:extLst>
   </p:cSld>
@@ -1329,7 +1329,7 @@
           <p:cNvPr id="2" name="タイトル 1">
             <a:extLst>
               <a:ext uri="{FF2B5EF4-FFF2-40B4-BE49-F238E27FC236}">
-                <a16:creationId xmlns:a16="http://schemas.microsoft.com/office/drawing/2014/main" id="{A835A38D-3738-389F-5846-D71ED25F578C}"/>
+                <a16:creationId xmlns:a16="http://schemas.microsoft.com/office/drawing/2014/main" id="{27A8B8A0-E953-CE85-E1EA-CD45DA194166}"/>
               </a:ext>
             </a:extLst>
           </p:cNvPr>
@@ -1357,7 +1357,7 @@
           <p:cNvPr id="3" name="コンテンツ プレースホルダー 2">
             <a:extLst>
               <a:ext uri="{FF2B5EF4-FFF2-40B4-BE49-F238E27FC236}">
-                <a16:creationId xmlns:a16="http://schemas.microsoft.com/office/drawing/2014/main" id="{14D27F7B-E150-C553-30AD-B8EB38F46043}"/>
+                <a16:creationId xmlns:a16="http://schemas.microsoft.com/office/drawing/2014/main" id="{9EF126C5-2E71-1C5C-DC80-9A7BCF7540D7}"/>
               </a:ext>
             </a:extLst>
           </p:cNvPr>
@@ -1451,7 +1451,7 @@
           <p:cNvPr id="4" name="コンテンツ プレースホルダー 3">
             <a:extLst>
               <a:ext uri="{FF2B5EF4-FFF2-40B4-BE49-F238E27FC236}">
-                <a16:creationId xmlns:a16="http://schemas.microsoft.com/office/drawing/2014/main" id="{345209CB-E3F7-44B3-421C-9FC8810C025A}"/>
+                <a16:creationId xmlns:a16="http://schemas.microsoft.com/office/drawing/2014/main" id="{15587A59-7F28-EA38-19F4-5A83388D936C}"/>
               </a:ext>
             </a:extLst>
           </p:cNvPr>
@@ -1545,7 +1545,7 @@
           <p:cNvPr id="5" name="日付プレースホルダー 4">
             <a:extLst>
               <a:ext uri="{FF2B5EF4-FFF2-40B4-BE49-F238E27FC236}">
-                <a16:creationId xmlns:a16="http://schemas.microsoft.com/office/drawing/2014/main" id="{D02D15B4-F158-98E1-7E2D-43E72EA1982A}"/>
+                <a16:creationId xmlns:a16="http://schemas.microsoft.com/office/drawing/2014/main" id="{A097980D-4F83-13CF-9E93-11E438DAF672}"/>
               </a:ext>
             </a:extLst>
           </p:cNvPr>
@@ -1561,7 +1561,7 @@
           <a:bodyPr/>
           <a:lstStyle/>
           <a:p>
-            <a:fld id="{77CCEE70-C42D-47A9-9950-FBF129698958}" type="datetimeFigureOut">
+            <a:fld id="{107415FD-A605-4415-8531-A4493AFFD1C7}" type="datetimeFigureOut">
               <a:rPr kumimoji="1" lang="ja-JP" altLang="en-US" smtClean="0"/>
               <a:t>2026/7/30</a:t>
             </a:fld>
@@ -1574,7 +1574,7 @@
           <p:cNvPr id="6" name="フッター プレースホルダー 5">
             <a:extLst>
               <a:ext uri="{FF2B5EF4-FFF2-40B4-BE49-F238E27FC236}">
-                <a16:creationId xmlns:a16="http://schemas.microsoft.com/office/drawing/2014/main" id="{48511A6A-EB02-CCDA-CFD8-E307C5E5EBC0}"/>
+                <a16:creationId xmlns:a16="http://schemas.microsoft.com/office/drawing/2014/main" id="{C1F044E0-0D22-45DB-A00C-9DCCA4CFB72D}"/>
               </a:ext>
             </a:extLst>
           </p:cNvPr>
@@ -1599,7 +1599,7 @@
           <p:cNvPr id="7" name="スライド番号プレースホルダー 6">
             <a:extLst>
               <a:ext uri="{FF2B5EF4-FFF2-40B4-BE49-F238E27FC236}">
-                <a16:creationId xmlns:a16="http://schemas.microsoft.com/office/drawing/2014/main" id="{80A73F86-8248-10F6-0134-0DE5F8B906E7}"/>
+                <a16:creationId xmlns:a16="http://schemas.microsoft.com/office/drawing/2014/main" id="{D3B7E307-B81C-B305-3701-28E8604182DA}"/>
               </a:ext>
             </a:extLst>
           </p:cNvPr>
@@ -1615,7 +1615,7 @@
           <a:bodyPr/>
           <a:lstStyle/>
           <a:p>
-            <a:fld id="{FC6E36EE-07AC-4E8E-821C-E8430B7C36EE}" type="slidenum">
+            <a:fld id="{3F0E1A20-1AFA-483B-A474-9995A141C2E4}" type="slidenum">
               <a:rPr kumimoji="1" lang="ja-JP" altLang="en-US" smtClean="0"/>
               <a:t>‹#›</a:t>
             </a:fld>
@@ -1626,7 +1626,7 @@
     </p:spTree>
     <p:extLst>
       <p:ext uri="{BB962C8B-B14F-4D97-AF65-F5344CB8AC3E}">
-        <p14:creationId xmlns:p14="http://schemas.microsoft.com/office/powerpoint/2010/main" val="2220026222"/>
+        <p14:creationId xmlns:p14="http://schemas.microsoft.com/office/powerpoint/2010/main" val="1382887289"/>
       </p:ext>
     </p:extLst>
   </p:cSld>
@@ -1658,7 +1658,7 @@
           <p:cNvPr id="2" name="タイトル 1">
             <a:extLst>
               <a:ext uri="{FF2B5EF4-FFF2-40B4-BE49-F238E27FC236}">
-                <a16:creationId xmlns:a16="http://schemas.microsoft.com/office/drawing/2014/main" id="{5F131119-FEA1-D527-38B8-BF6AFC2BCD1B}"/>
+                <a16:creationId xmlns:a16="http://schemas.microsoft.com/office/drawing/2014/main" id="{19E11C96-925E-255E-AAB7-EE5BCF21AD23}"/>
               </a:ext>
             </a:extLst>
           </p:cNvPr>
@@ -1691,7 +1691,7 @@
           <p:cNvPr id="3" name="テキスト プレースホルダー 2">
             <a:extLst>
               <a:ext uri="{FF2B5EF4-FFF2-40B4-BE49-F238E27FC236}">
-                <a16:creationId xmlns:a16="http://schemas.microsoft.com/office/drawing/2014/main" id="{D98A4263-B9C5-C55E-925E-B4F1F99115F2}"/>
+                <a16:creationId xmlns:a16="http://schemas.microsoft.com/office/drawing/2014/main" id="{31385BFD-84A6-A16A-5772-0DF2CCEE7253}"/>
               </a:ext>
             </a:extLst>
           </p:cNvPr>
@@ -1762,7 +1762,7 @@
           <p:cNvPr id="4" name="コンテンツ プレースホルダー 3">
             <a:extLst>
               <a:ext uri="{FF2B5EF4-FFF2-40B4-BE49-F238E27FC236}">
-                <a16:creationId xmlns:a16="http://schemas.microsoft.com/office/drawing/2014/main" id="{700420FA-9938-F7DB-9E4A-C9FE0C198A7A}"/>
+                <a16:creationId xmlns:a16="http://schemas.microsoft.com/office/drawing/2014/main" id="{536DC7E9-8502-90F2-6003-DFE9A34F3436}"/>
               </a:ext>
             </a:extLst>
           </p:cNvPr>
@@ -1856,7 +1856,7 @@
           <p:cNvPr id="5" name="テキスト プレースホルダー 4">
             <a:extLst>
               <a:ext uri="{FF2B5EF4-FFF2-40B4-BE49-F238E27FC236}">
-                <a16:creationId xmlns:a16="http://schemas.microsoft.com/office/drawing/2014/main" id="{B8CB519B-49AA-D629-C413-6F085E3CB12B}"/>
+                <a16:creationId xmlns:a16="http://schemas.microsoft.com/office/drawing/2014/main" id="{78491808-572C-5216-2CBD-BEA58103B126}"/>
               </a:ext>
             </a:extLst>
           </p:cNvPr>
@@ -1927,7 +1927,7 @@
           <p:cNvPr id="6" name="コンテンツ プレースホルダー 5">
             <a:extLst>
               <a:ext uri="{FF2B5EF4-FFF2-40B4-BE49-F238E27FC236}">
-                <a16:creationId xmlns:a16="http://schemas.microsoft.com/office/drawing/2014/main" id="{376AD4C3-E61D-B3F3-85E3-0312E14279DA}"/>
+                <a16:creationId xmlns:a16="http://schemas.microsoft.com/office/drawing/2014/main" id="{6193B542-6EE6-0DFC-69E3-FE97598324D3}"/>
               </a:ext>
             </a:extLst>
           </p:cNvPr>
@@ -2021,7 +2021,7 @@
           <p:cNvPr id="7" name="日付プレースホルダー 6">
             <a:extLst>
               <a:ext uri="{FF2B5EF4-FFF2-40B4-BE49-F238E27FC236}">
-                <a16:creationId xmlns:a16="http://schemas.microsoft.com/office/drawing/2014/main" id="{F5FD15B3-2C49-9A5A-7795-41BDBBDCBC75}"/>
+                <a16:creationId xmlns:a16="http://schemas.microsoft.com/office/drawing/2014/main" id="{9E67BEFF-A7A7-1086-5E55-7E760A8ED996}"/>
               </a:ext>
             </a:extLst>
           </p:cNvPr>
@@ -2037,7 +2037,7 @@
           <a:bodyPr/>
           <a:lstStyle/>
           <a:p>
-            <a:fld id="{77CCEE70-C42D-47A9-9950-FBF129698958}" type="datetimeFigureOut">
+            <a:fld id="{107415FD-A605-4415-8531-A4493AFFD1C7}" type="datetimeFigureOut">
               <a:rPr kumimoji="1" lang="ja-JP" altLang="en-US" smtClean="0"/>
               <a:t>2026/7/30</a:t>
             </a:fld>
@@ -2050,7 +2050,7 @@
           <p:cNvPr id="8" name="フッター プレースホルダー 7">
             <a:extLst>
               <a:ext uri="{FF2B5EF4-FFF2-40B4-BE49-F238E27FC236}">
-                <a16:creationId xmlns:a16="http://schemas.microsoft.com/office/drawing/2014/main" id="{4D62F2FD-E39B-7804-E39A-96FF4A3239F5}"/>
+                <a16:creationId xmlns:a16="http://schemas.microsoft.com/office/drawing/2014/main" id="{FC0602D3-F4F6-D1CE-52A8-31C631589841}"/>
               </a:ext>
             </a:extLst>
           </p:cNvPr>
@@ -2075,7 +2075,7 @@
           <p:cNvPr id="9" name="スライド番号プレースホルダー 8">
             <a:extLst>
               <a:ext uri="{FF2B5EF4-FFF2-40B4-BE49-F238E27FC236}">
-                <a16:creationId xmlns:a16="http://schemas.microsoft.com/office/drawing/2014/main" id="{3E484D81-6855-3782-2147-1929CC2F9E4D}"/>
+                <a16:creationId xmlns:a16="http://schemas.microsoft.com/office/drawing/2014/main" id="{E2FA52EB-AA33-BD06-B941-5272C89DFE20}"/>
               </a:ext>
             </a:extLst>
           </p:cNvPr>
@@ -2091,7 +2091,7 @@
           <a:bodyPr/>
           <a:lstStyle/>
           <a:p>
-            <a:fld id="{FC6E36EE-07AC-4E8E-821C-E8430B7C36EE}" type="slidenum">
+            <a:fld id="{3F0E1A20-1AFA-483B-A474-9995A141C2E4}" type="slidenum">
               <a:rPr kumimoji="1" lang="ja-JP" altLang="en-US" smtClean="0"/>
               <a:t>‹#›</a:t>
             </a:fld>
@@ -2102,7 +2102,7 @@
     </p:spTree>
     <p:extLst>
       <p:ext uri="{BB962C8B-B14F-4D97-AF65-F5344CB8AC3E}">
-        <p14:creationId xmlns:p14="http://schemas.microsoft.com/office/powerpoint/2010/main" val="1509290838"/>
+        <p14:creationId xmlns:p14="http://schemas.microsoft.com/office/powerpoint/2010/main" val="2643475333"/>
       </p:ext>
     </p:extLst>
   </p:cSld>
@@ -2134,7 +2134,7 @@
           <p:cNvPr id="2" name="タイトル 1">
             <a:extLst>
               <a:ext uri="{FF2B5EF4-FFF2-40B4-BE49-F238E27FC236}">
-                <a16:creationId xmlns:a16="http://schemas.microsoft.com/office/drawing/2014/main" id="{CEA9F5FF-643D-2A14-4FE9-E0DB004D9227}"/>
+                <a16:creationId xmlns:a16="http://schemas.microsoft.com/office/drawing/2014/main" id="{1EAB833A-C6F6-2FE9-6700-12F7318BC254}"/>
               </a:ext>
             </a:extLst>
           </p:cNvPr>
@@ -2162,7 +2162,7 @@
           <p:cNvPr id="3" name="日付プレースホルダー 2">
             <a:extLst>
               <a:ext uri="{FF2B5EF4-FFF2-40B4-BE49-F238E27FC236}">
-                <a16:creationId xmlns:a16="http://schemas.microsoft.com/office/drawing/2014/main" id="{4658EBBE-5436-4B7D-0576-F12F94FF06AF}"/>
+                <a16:creationId xmlns:a16="http://schemas.microsoft.com/office/drawing/2014/main" id="{624AD178-A0D8-7D62-A8C0-4EBE3CBEECF4}"/>
               </a:ext>
             </a:extLst>
           </p:cNvPr>
@@ -2178,7 +2178,7 @@
           <a:bodyPr/>
           <a:lstStyle/>
           <a:p>
-            <a:fld id="{77CCEE70-C42D-47A9-9950-FBF129698958}" type="datetimeFigureOut">
+            <a:fld id="{107415FD-A605-4415-8531-A4493AFFD1C7}" type="datetimeFigureOut">
               <a:rPr kumimoji="1" lang="ja-JP" altLang="en-US" smtClean="0"/>
               <a:t>2026/7/30</a:t>
             </a:fld>
@@ -2191,7 +2191,7 @@
           <p:cNvPr id="4" name="フッター プレースホルダー 3">
             <a:extLst>
               <a:ext uri="{FF2B5EF4-FFF2-40B4-BE49-F238E27FC236}">
-                <a16:creationId xmlns:a16="http://schemas.microsoft.com/office/drawing/2014/main" id="{687B33B5-E0CE-943F-4E57-824DB614C3C2}"/>
+                <a16:creationId xmlns:a16="http://schemas.microsoft.com/office/drawing/2014/main" id="{CADFE800-9670-9841-BBCD-94FF741369DC}"/>
               </a:ext>
             </a:extLst>
           </p:cNvPr>
@@ -2216,7 +2216,7 @@
           <p:cNvPr id="5" name="スライド番号プレースホルダー 4">
             <a:extLst>
               <a:ext uri="{FF2B5EF4-FFF2-40B4-BE49-F238E27FC236}">
-                <a16:creationId xmlns:a16="http://schemas.microsoft.com/office/drawing/2014/main" id="{45160BDF-F8A3-BBE7-110C-FE28E0AD96DA}"/>
+                <a16:creationId xmlns:a16="http://schemas.microsoft.com/office/drawing/2014/main" id="{ACF1B352-61A5-DF62-2F20-AEA6F003038F}"/>
               </a:ext>
             </a:extLst>
           </p:cNvPr>
@@ -2232,7 +2232,7 @@
           <a:bodyPr/>
           <a:lstStyle/>
           <a:p>
-            <a:fld id="{FC6E36EE-07AC-4E8E-821C-E8430B7C36EE}" type="slidenum">
+            <a:fld id="{3F0E1A20-1AFA-483B-A474-9995A141C2E4}" type="slidenum">
               <a:rPr kumimoji="1" lang="ja-JP" altLang="en-US" smtClean="0"/>
               <a:t>‹#›</a:t>
             </a:fld>
@@ -2243,7 +2243,7 @@
     </p:spTree>
     <p:extLst>
       <p:ext uri="{BB962C8B-B14F-4D97-AF65-F5344CB8AC3E}">
-        <p14:creationId xmlns:p14="http://schemas.microsoft.com/office/powerpoint/2010/main" val="1841173705"/>
+        <p14:creationId xmlns:p14="http://schemas.microsoft.com/office/powerpoint/2010/main" val="902118115"/>
       </p:ext>
     </p:extLst>
   </p:cSld>
@@ -2275,7 +2275,7 @@
           <p:cNvPr id="2" name="日付プレースホルダー 1">
             <a:extLst>
               <a:ext uri="{FF2B5EF4-FFF2-40B4-BE49-F238E27FC236}">
-                <a16:creationId xmlns:a16="http://schemas.microsoft.com/office/drawing/2014/main" id="{5DC2F52D-A131-1361-0AB8-D8CA94699267}"/>
+                <a16:creationId xmlns:a16="http://schemas.microsoft.com/office/drawing/2014/main" id="{11D0E922-1B35-4F3A-F9EF-376DF5644BB0}"/>
               </a:ext>
             </a:extLst>
           </p:cNvPr>
@@ -2291,7 +2291,7 @@
           <a:bodyPr/>
           <a:lstStyle/>
           <a:p>
-            <a:fld id="{77CCEE70-C42D-47A9-9950-FBF129698958}" type="datetimeFigureOut">
+            <a:fld id="{107415FD-A605-4415-8531-A4493AFFD1C7}" type="datetimeFigureOut">
               <a:rPr kumimoji="1" lang="ja-JP" altLang="en-US" smtClean="0"/>
               <a:t>2026/7/30</a:t>
             </a:fld>
@@ -2304,7 +2304,7 @@
           <p:cNvPr id="3" name="フッター プレースホルダー 2">
             <a:extLst>
               <a:ext uri="{FF2B5EF4-FFF2-40B4-BE49-F238E27FC236}">
-                <a16:creationId xmlns:a16="http://schemas.microsoft.com/office/drawing/2014/main" id="{AC476C72-ED71-1628-1D17-4CE125FEB67F}"/>
+                <a16:creationId xmlns:a16="http://schemas.microsoft.com/office/drawing/2014/main" id="{55A3B9D7-0F21-60BD-6E69-3CE4C474B543}"/>
               </a:ext>
             </a:extLst>
           </p:cNvPr>
@@ -2329,7 +2329,7 @@
           <p:cNvPr id="4" name="スライド番号プレースホルダー 3">
             <a:extLst>
               <a:ext uri="{FF2B5EF4-FFF2-40B4-BE49-F238E27FC236}">
-                <a16:creationId xmlns:a16="http://schemas.microsoft.com/office/drawing/2014/main" id="{12B96FA1-C122-621B-0E52-22D8ACC2EF08}"/>
+                <a16:creationId xmlns:a16="http://schemas.microsoft.com/office/drawing/2014/main" id="{63246459-7672-9368-23A8-E5263CEC6A40}"/>
               </a:ext>
             </a:extLst>
           </p:cNvPr>
@@ -2345,7 +2345,7 @@
           <a:bodyPr/>
           <a:lstStyle/>
           <a:p>
-            <a:fld id="{FC6E36EE-07AC-4E8E-821C-E8430B7C36EE}" type="slidenum">
+            <a:fld id="{3F0E1A20-1AFA-483B-A474-9995A141C2E4}" type="slidenum">
               <a:rPr kumimoji="1" lang="ja-JP" altLang="en-US" smtClean="0"/>
               <a:t>‹#›</a:t>
             </a:fld>
@@ -2356,7 +2356,7 @@
     </p:spTree>
     <p:extLst>
       <p:ext uri="{BB962C8B-B14F-4D97-AF65-F5344CB8AC3E}">
-        <p14:creationId xmlns:p14="http://schemas.microsoft.com/office/powerpoint/2010/main" val="102789310"/>
+        <p14:creationId xmlns:p14="http://schemas.microsoft.com/office/powerpoint/2010/main" val="2786351881"/>
       </p:ext>
     </p:extLst>
   </p:cSld>
@@ -2388,7 +2388,7 @@
           <p:cNvPr id="2" name="タイトル 1">
             <a:extLst>
               <a:ext uri="{FF2B5EF4-FFF2-40B4-BE49-F238E27FC236}">
-                <a16:creationId xmlns:a16="http://schemas.microsoft.com/office/drawing/2014/main" id="{D96C1B52-2349-DEE4-A4BB-06E4271E05ED}"/>
+                <a16:creationId xmlns:a16="http://schemas.microsoft.com/office/drawing/2014/main" id="{443EC698-4583-1212-FC03-5A896AED0B6D}"/>
               </a:ext>
             </a:extLst>
           </p:cNvPr>
@@ -2425,7 +2425,7 @@
           <p:cNvPr id="3" name="コンテンツ プレースホルダー 2">
             <a:extLst>
               <a:ext uri="{FF2B5EF4-FFF2-40B4-BE49-F238E27FC236}">
-                <a16:creationId xmlns:a16="http://schemas.microsoft.com/office/drawing/2014/main" id="{891130E2-C46E-7F1F-5290-98F4CE34C9B8}"/>
+                <a16:creationId xmlns:a16="http://schemas.microsoft.com/office/drawing/2014/main" id="{A94A59D8-4E94-337E-A2D2-897D123205C3}"/>
               </a:ext>
             </a:extLst>
           </p:cNvPr>
@@ -2547,7 +2547,7 @@
           <p:cNvPr id="4" name="テキスト プレースホルダー 3">
             <a:extLst>
               <a:ext uri="{FF2B5EF4-FFF2-40B4-BE49-F238E27FC236}">
-                <a16:creationId xmlns:a16="http://schemas.microsoft.com/office/drawing/2014/main" id="{743DB21F-D824-C26A-E959-A96C709F4DAA}"/>
+                <a16:creationId xmlns:a16="http://schemas.microsoft.com/office/drawing/2014/main" id="{292D9680-B165-3882-9015-D92AAA98D50D}"/>
               </a:ext>
             </a:extLst>
           </p:cNvPr>
@@ -2618,7 +2618,7 @@
           <p:cNvPr id="5" name="日付プレースホルダー 4">
             <a:extLst>
               <a:ext uri="{FF2B5EF4-FFF2-40B4-BE49-F238E27FC236}">
-                <a16:creationId xmlns:a16="http://schemas.microsoft.com/office/drawing/2014/main" id="{C2AAE3DC-D876-450B-C272-6466AD0CE0AF}"/>
+                <a16:creationId xmlns:a16="http://schemas.microsoft.com/office/drawing/2014/main" id="{5F978E65-3DED-0B58-9D72-5251588259E1}"/>
               </a:ext>
             </a:extLst>
           </p:cNvPr>
@@ -2634,7 +2634,7 @@
           <a:bodyPr/>
           <a:lstStyle/>
           <a:p>
-            <a:fld id="{77CCEE70-C42D-47A9-9950-FBF129698958}" type="datetimeFigureOut">
+            <a:fld id="{107415FD-A605-4415-8531-A4493AFFD1C7}" type="datetimeFigureOut">
               <a:rPr kumimoji="1" lang="ja-JP" altLang="en-US" smtClean="0"/>
               <a:t>2026/7/30</a:t>
             </a:fld>
@@ -2647,7 +2647,7 @@
           <p:cNvPr id="6" name="フッター プレースホルダー 5">
             <a:extLst>
               <a:ext uri="{FF2B5EF4-FFF2-40B4-BE49-F238E27FC236}">
-                <a16:creationId xmlns:a16="http://schemas.microsoft.com/office/drawing/2014/main" id="{6F1BF0B3-3CAF-09FD-9BC0-9033558B3FB2}"/>
+                <a16:creationId xmlns:a16="http://schemas.microsoft.com/office/drawing/2014/main" id="{CBD97E2D-3FAF-FFC7-D9CC-7E9181F50D6E}"/>
               </a:ext>
             </a:extLst>
           </p:cNvPr>
@@ -2672,7 +2672,7 @@
           <p:cNvPr id="7" name="スライド番号プレースホルダー 6">
             <a:extLst>
               <a:ext uri="{FF2B5EF4-FFF2-40B4-BE49-F238E27FC236}">
-                <a16:creationId xmlns:a16="http://schemas.microsoft.com/office/drawing/2014/main" id="{7C39D5DC-E991-D355-01E9-E1EE084647CE}"/>
+                <a16:creationId xmlns:a16="http://schemas.microsoft.com/office/drawing/2014/main" id="{060A8124-0A97-9350-5FF0-C23052C68723}"/>
               </a:ext>
             </a:extLst>
           </p:cNvPr>
@@ -2688,7 +2688,7 @@
           <a:bodyPr/>
           <a:lstStyle/>
           <a:p>
-            <a:fld id="{FC6E36EE-07AC-4E8E-821C-E8430B7C36EE}" type="slidenum">
+            <a:fld id="{3F0E1A20-1AFA-483B-A474-9995A141C2E4}" type="slidenum">
               <a:rPr kumimoji="1" lang="ja-JP" altLang="en-US" smtClean="0"/>
               <a:t>‹#›</a:t>
             </a:fld>
@@ -2699,7 +2699,7 @@
     </p:spTree>
     <p:extLst>
       <p:ext uri="{BB962C8B-B14F-4D97-AF65-F5344CB8AC3E}">
-        <p14:creationId xmlns:p14="http://schemas.microsoft.com/office/powerpoint/2010/main" val="140819040"/>
+        <p14:creationId xmlns:p14="http://schemas.microsoft.com/office/powerpoint/2010/main" val="3417108769"/>
       </p:ext>
     </p:extLst>
   </p:cSld>
@@ -2731,7 +2731,7 @@
           <p:cNvPr id="2" name="タイトル 1">
             <a:extLst>
               <a:ext uri="{FF2B5EF4-FFF2-40B4-BE49-F238E27FC236}">
-                <a16:creationId xmlns:a16="http://schemas.microsoft.com/office/drawing/2014/main" id="{928C368F-3000-3B9B-F573-E570F02AA4D8}"/>
+                <a16:creationId xmlns:a16="http://schemas.microsoft.com/office/drawing/2014/main" id="{E531C48C-F969-49E1-894D-3677DA424175}"/>
               </a:ext>
             </a:extLst>
           </p:cNvPr>
@@ -2768,7 +2768,7 @@
           <p:cNvPr id="3" name="図プレースホルダー 2">
             <a:extLst>
               <a:ext uri="{FF2B5EF4-FFF2-40B4-BE49-F238E27FC236}">
-                <a16:creationId xmlns:a16="http://schemas.microsoft.com/office/drawing/2014/main" id="{9352202E-ABFA-E3F7-56A3-2A4214963B43}"/>
+                <a16:creationId xmlns:a16="http://schemas.microsoft.com/office/drawing/2014/main" id="{FCAEDAFA-DE78-F310-8B3B-9E53673D707D}"/>
               </a:ext>
             </a:extLst>
           </p:cNvPr>
@@ -2835,7 +2835,7 @@
           <p:cNvPr id="4" name="テキスト プレースホルダー 3">
             <a:extLst>
               <a:ext uri="{FF2B5EF4-FFF2-40B4-BE49-F238E27FC236}">
-                <a16:creationId xmlns:a16="http://schemas.microsoft.com/office/drawing/2014/main" id="{156CF808-91AD-4187-8DAD-95A79A0FC55E}"/>
+                <a16:creationId xmlns:a16="http://schemas.microsoft.com/office/drawing/2014/main" id="{7FC2D49D-D4CF-A0C2-CC33-C8D8BE8275F9}"/>
               </a:ext>
             </a:extLst>
           </p:cNvPr>
@@ -2906,7 +2906,7 @@
           <p:cNvPr id="5" name="日付プレースホルダー 4">
             <a:extLst>
               <a:ext uri="{FF2B5EF4-FFF2-40B4-BE49-F238E27FC236}">
-                <a16:creationId xmlns:a16="http://schemas.microsoft.com/office/drawing/2014/main" id="{45FF8CCF-8B51-E28F-706C-1D03277F5ED2}"/>
+                <a16:creationId xmlns:a16="http://schemas.microsoft.com/office/drawing/2014/main" id="{498D8FD2-DBEE-0100-A728-69D1E0E5BF3D}"/>
               </a:ext>
             </a:extLst>
           </p:cNvPr>
@@ -2922,7 +2922,7 @@
           <a:bodyPr/>
           <a:lstStyle/>
           <a:p>
-            <a:fld id="{77CCEE70-C42D-47A9-9950-FBF129698958}" type="datetimeFigureOut">
+            <a:fld id="{107415FD-A605-4415-8531-A4493AFFD1C7}" type="datetimeFigureOut">
               <a:rPr kumimoji="1" lang="ja-JP" altLang="en-US" smtClean="0"/>
               <a:t>2026/7/30</a:t>
             </a:fld>
@@ -2935,7 +2935,7 @@
           <p:cNvPr id="6" name="フッター プレースホルダー 5">
             <a:extLst>
               <a:ext uri="{FF2B5EF4-FFF2-40B4-BE49-F238E27FC236}">
-                <a16:creationId xmlns:a16="http://schemas.microsoft.com/office/drawing/2014/main" id="{B0238C4D-C9DA-9F93-8342-9D88ACA6B8B0}"/>
+                <a16:creationId xmlns:a16="http://schemas.microsoft.com/office/drawing/2014/main" id="{5E609FAC-97CE-CE75-4C98-EB777D470AD1}"/>
               </a:ext>
             </a:extLst>
           </p:cNvPr>
@@ -2960,7 +2960,7 @@
           <p:cNvPr id="7" name="スライド番号プレースホルダー 6">
             <a:extLst>
               <a:ext uri="{FF2B5EF4-FFF2-40B4-BE49-F238E27FC236}">
-                <a16:creationId xmlns:a16="http://schemas.microsoft.com/office/drawing/2014/main" id="{35FF6809-225D-6E69-91A0-A732667703AC}"/>
+                <a16:creationId xmlns:a16="http://schemas.microsoft.com/office/drawing/2014/main" id="{7BF45F58-A266-14FB-0717-C02F0EE6A34B}"/>
               </a:ext>
             </a:extLst>
           </p:cNvPr>
@@ -2976,7 +2976,7 @@
           <a:bodyPr/>
           <a:lstStyle/>
           <a:p>
-            <a:fld id="{FC6E36EE-07AC-4E8E-821C-E8430B7C36EE}" type="slidenum">
+            <a:fld id="{3F0E1A20-1AFA-483B-A474-9995A141C2E4}" type="slidenum">
               <a:rPr kumimoji="1" lang="ja-JP" altLang="en-US" smtClean="0"/>
               <a:t>‹#›</a:t>
             </a:fld>
@@ -2987,7 +2987,7 @@
     </p:spTree>
     <p:extLst>
       <p:ext uri="{BB962C8B-B14F-4D97-AF65-F5344CB8AC3E}">
-        <p14:creationId xmlns:p14="http://schemas.microsoft.com/office/powerpoint/2010/main" val="268231999"/>
+        <p14:creationId xmlns:p14="http://schemas.microsoft.com/office/powerpoint/2010/main" val="3009427544"/>
       </p:ext>
     </p:extLst>
   </p:cSld>
@@ -3024,7 +3024,7 @@
           <p:cNvPr id="2" name="タイトル プレースホルダー 1">
             <a:extLst>
               <a:ext uri="{FF2B5EF4-FFF2-40B4-BE49-F238E27FC236}">
-                <a16:creationId xmlns:a16="http://schemas.microsoft.com/office/drawing/2014/main" id="{12648907-F5EE-24A7-0FF4-8A0151A110B9}"/>
+                <a16:creationId xmlns:a16="http://schemas.microsoft.com/office/drawing/2014/main" id="{3265731E-04EB-B2FC-105A-8610C18A144E}"/>
               </a:ext>
             </a:extLst>
           </p:cNvPr>
@@ -3062,7 +3062,7 @@
           <p:cNvPr id="3" name="テキスト プレースホルダー 2">
             <a:extLst>
               <a:ext uri="{FF2B5EF4-FFF2-40B4-BE49-F238E27FC236}">
-                <a16:creationId xmlns:a16="http://schemas.microsoft.com/office/drawing/2014/main" id="{E947DEEC-08B5-0E8E-46E8-9237CBB737A2}"/>
+                <a16:creationId xmlns:a16="http://schemas.microsoft.com/office/drawing/2014/main" id="{CAB3143B-8662-27A0-BA8A-96CE751C1B6D}"/>
               </a:ext>
             </a:extLst>
           </p:cNvPr>
@@ -3161,7 +3161,7 @@
           <p:cNvPr id="4" name="日付プレースホルダー 3">
             <a:extLst>
               <a:ext uri="{FF2B5EF4-FFF2-40B4-BE49-F238E27FC236}">
-                <a16:creationId xmlns:a16="http://schemas.microsoft.com/office/drawing/2014/main" id="{15874540-2B2F-9B06-DB83-932FC39056AC}"/>
+                <a16:creationId xmlns:a16="http://schemas.microsoft.com/office/drawing/2014/main" id="{144693F4-E7BC-A2CA-3F8A-46335A4E9A63}"/>
               </a:ext>
             </a:extLst>
           </p:cNvPr>
@@ -3195,7 +3195,7 @@
             </a:lvl1pPr>
           </a:lstStyle>
           <a:p>
-            <a:fld id="{77CCEE70-C42D-47A9-9950-FBF129698958}" type="datetimeFigureOut">
+            <a:fld id="{107415FD-A605-4415-8531-A4493AFFD1C7}" type="datetimeFigureOut">
               <a:rPr kumimoji="1" lang="ja-JP" altLang="en-US" smtClean="0"/>
               <a:t>2026/7/30</a:t>
             </a:fld>
@@ -3208,7 +3208,7 @@
           <p:cNvPr id="5" name="フッター プレースホルダー 4">
             <a:extLst>
               <a:ext uri="{FF2B5EF4-FFF2-40B4-BE49-F238E27FC236}">
-                <a16:creationId xmlns:a16="http://schemas.microsoft.com/office/drawing/2014/main" id="{F03ED9DA-D4A9-DE5C-0F8E-510567C80344}"/>
+                <a16:creationId xmlns:a16="http://schemas.microsoft.com/office/drawing/2014/main" id="{9C4841DE-9323-5680-C98B-2DEFFB6206B8}"/>
               </a:ext>
             </a:extLst>
           </p:cNvPr>
@@ -3251,7 +3251,7 @@
           <p:cNvPr id="6" name="スライド番号プレースホルダー 5">
             <a:extLst>
               <a:ext uri="{FF2B5EF4-FFF2-40B4-BE49-F238E27FC236}">
-                <a16:creationId xmlns:a16="http://schemas.microsoft.com/office/drawing/2014/main" id="{AE180817-D18B-523F-C906-E47A76C0B3A2}"/>
+                <a16:creationId xmlns:a16="http://schemas.microsoft.com/office/drawing/2014/main" id="{3A8290E4-3B06-25DA-E146-09C5A6D88F54}"/>
               </a:ext>
             </a:extLst>
           </p:cNvPr>
@@ -3285,7 +3285,7 @@
             </a:lvl1pPr>
           </a:lstStyle>
           <a:p>
-            <a:fld id="{FC6E36EE-07AC-4E8E-821C-E8430B7C36EE}" type="slidenum">
+            <a:fld id="{3F0E1A20-1AFA-483B-A474-9995A141C2E4}" type="slidenum">
               <a:rPr kumimoji="1" lang="ja-JP" altLang="en-US" smtClean="0"/>
               <a:t>‹#›</a:t>
             </a:fld>
@@ -3296,7 +3296,7 @@
     </p:spTree>
     <p:extLst>
       <p:ext uri="{BB962C8B-B14F-4D97-AF65-F5344CB8AC3E}">
-        <p14:creationId xmlns:p14="http://schemas.microsoft.com/office/powerpoint/2010/main" val="2325615977"/>
+        <p14:creationId xmlns:p14="http://schemas.microsoft.com/office/powerpoint/2010/main" val="150884172"/>
       </p:ext>
     </p:extLst>
   </p:cSld>
@@ -3619,7 +3619,7 @@
           <p:cNvPr id="2" name="テキスト ボックス 1">
             <a:extLst>
               <a:ext uri="{FF2B5EF4-FFF2-40B4-BE49-F238E27FC236}">
-                <a16:creationId xmlns:a16="http://schemas.microsoft.com/office/drawing/2014/main" id="{5BF179D0-1696-B688-6C3B-44AF2C498518}"/>
+                <a16:creationId xmlns:a16="http://schemas.microsoft.com/office/drawing/2014/main" id="{3157C1A7-CAC3-F05B-D5E2-012273A8DB2F}"/>
               </a:ext>
             </a:extLst>
           </p:cNvPr>
@@ -3665,7 +3665,7 @@
           <p:cNvPr id="3" name="テキスト ボックス 2">
             <a:extLst>
               <a:ext uri="{FF2B5EF4-FFF2-40B4-BE49-F238E27FC236}">
-                <a16:creationId xmlns:a16="http://schemas.microsoft.com/office/drawing/2014/main" id="{2E6CE0E4-635E-1955-3C09-F2AB7C5C103B}"/>
+                <a16:creationId xmlns:a16="http://schemas.microsoft.com/office/drawing/2014/main" id="{65FD6A46-F6C8-EA60-F00E-7C7DC7325138}"/>
               </a:ext>
             </a:extLst>
           </p:cNvPr>
@@ -3714,7 +3714,7 @@
           <p:cNvPr id="4" name="テキスト ボックス 3">
             <a:extLst>
               <a:ext uri="{FF2B5EF4-FFF2-40B4-BE49-F238E27FC236}">
-                <a16:creationId xmlns:a16="http://schemas.microsoft.com/office/drawing/2014/main" id="{EF2FCA6D-E947-ACB7-3835-A81B3C9DA066}"/>
+                <a16:creationId xmlns:a16="http://schemas.microsoft.com/office/drawing/2014/main" id="{B5269A74-C697-6E3C-9081-DE3CD2F039A9}"/>
               </a:ext>
             </a:extLst>
           </p:cNvPr>
@@ -3754,7 +3754,7 @@
           <p:cNvPr id="5" name="テキスト ボックス 4">
             <a:extLst>
               <a:ext uri="{FF2B5EF4-FFF2-40B4-BE49-F238E27FC236}">
-                <a16:creationId xmlns:a16="http://schemas.microsoft.com/office/drawing/2014/main" id="{690AA60F-C02B-8AA0-B8F2-6F1042994839}"/>
+                <a16:creationId xmlns:a16="http://schemas.microsoft.com/office/drawing/2014/main" id="{7461C6E5-4492-03A3-DF22-8620E60FE0EE}"/>
               </a:ext>
             </a:extLst>
           </p:cNvPr>
@@ -3801,7 +3801,7 @@
             <a:hlinkClick r:id="" action="ppaction://media"/>
             <a:extLst>
               <a:ext uri="{FF2B5EF4-FFF2-40B4-BE49-F238E27FC236}">
-                <a16:creationId xmlns:a16="http://schemas.microsoft.com/office/drawing/2014/main" id="{7FD21BE6-7998-DA59-FC29-8BAE7624E317}"/>
+                <a16:creationId xmlns:a16="http://schemas.microsoft.com/office/drawing/2014/main" id="{0B526A93-CA41-B310-9F51-7A4F01619536}"/>
               </a:ext>
             </a:extLst>
           </p:cNvPr>
@@ -3836,7 +3836,7 @@
     </p:spTree>
     <p:extLst>
       <p:ext uri="{BB962C8B-B14F-4D97-AF65-F5344CB8AC3E}">
-        <p14:creationId xmlns:p14="http://schemas.microsoft.com/office/powerpoint/2010/main" val="4206505247"/>
+        <p14:creationId xmlns:p14="http://schemas.microsoft.com/office/powerpoint/2010/main" val="3111759533"/>
       </p:ext>
     </p:extLst>
   </p:cSld>
@@ -3960,7 +3960,7 @@
           <p:cNvPr id="2" name="テキスト ボックス 1">
             <a:extLst>
               <a:ext uri="{FF2B5EF4-FFF2-40B4-BE49-F238E27FC236}">
-                <a16:creationId xmlns:a16="http://schemas.microsoft.com/office/drawing/2014/main" id="{E627EE1D-9282-54CF-D872-6009A67F8752}"/>
+                <a16:creationId xmlns:a16="http://schemas.microsoft.com/office/drawing/2014/main" id="{39AC147F-046A-06BA-F52F-7FC6BA034E54}"/>
               </a:ext>
             </a:extLst>
           </p:cNvPr>
@@ -4006,7 +4006,7 @@
           <p:cNvPr id="3" name="テキスト ボックス 2">
             <a:extLst>
               <a:ext uri="{FF2B5EF4-FFF2-40B4-BE49-F238E27FC236}">
-                <a16:creationId xmlns:a16="http://schemas.microsoft.com/office/drawing/2014/main" id="{41C336D3-DD7D-9C13-1A09-D6ABBCE52EDC}"/>
+                <a16:creationId xmlns:a16="http://schemas.microsoft.com/office/drawing/2014/main" id="{F2D7DB4C-6E00-D99D-37CA-6BC7079B7D33}"/>
               </a:ext>
             </a:extLst>
           </p:cNvPr>
@@ -4046,7 +4046,7 @@
           <p:cNvPr id="4" name="テキスト ボックス 3">
             <a:extLst>
               <a:ext uri="{FF2B5EF4-FFF2-40B4-BE49-F238E27FC236}">
-                <a16:creationId xmlns:a16="http://schemas.microsoft.com/office/drawing/2014/main" id="{D38019BA-6447-687A-B294-FC0E099BD04A}"/>
+                <a16:creationId xmlns:a16="http://schemas.microsoft.com/office/drawing/2014/main" id="{9B0A3D04-8F4D-ACCC-F653-18F92564EAD6}"/>
               </a:ext>
             </a:extLst>
           </p:cNvPr>
@@ -4056,7 +4056,7 @@
         <p:spPr>
           <a:xfrm>
             <a:off x="533400" y="3429000"/>
-            <a:ext cx="10795000" cy="707886"/>
+            <a:ext cx="10795000" cy="400110"/>
           </a:xfrm>
           <a:prstGeom prst="rect">
             <a:avLst/>
@@ -4076,14 +4076,17 @@
                 </a:solidFill>
                 <a:latin typeface="Arial" panose="020B0604020202020204" pitchFamily="34" charset="0"/>
               </a:rPr>
-              <a:t>Trip Route Stay Priority 1 app from the PDF deep dive: travel route, accommodation and local spot monetization</a:t>
-            </a:r>
-            <a:endParaRPr kumimoji="1" lang="ja-JP" altLang="en-US" sz="2000">
-              <a:solidFill>
-                <a:srgbClr val="333333"/>
-              </a:solidFill>
-              <a:latin typeface="Arial" panose="020B0604020202020204" pitchFamily="34" charset="0"/>
-            </a:endParaRPr>
+              <a:t>Trip Route Stay</a:t>
+            </a:r>
+            <a:r>
+              <a:rPr kumimoji="1" lang="ja-JP" altLang="en-US" sz="2000">
+                <a:solidFill>
+                  <a:srgbClr val="333333"/>
+                </a:solidFill>
+                <a:latin typeface="Arial" panose="020B0604020202020204" pitchFamily="34" charset="0"/>
+              </a:rPr>
+              <a:t>の目的、構成、実装を公開コードから確認できるプロジェクトです。</a:t>
+            </a:r>
           </a:p>
         </p:txBody>
       </p:sp>
@@ -4092,7 +4095,7 @@
           <p:cNvPr id="5" name="テキスト ボックス 4">
             <a:extLst>
               <a:ext uri="{FF2B5EF4-FFF2-40B4-BE49-F238E27FC236}">
-                <a16:creationId xmlns:a16="http://schemas.microsoft.com/office/drawing/2014/main" id="{09AF83CA-0B20-BC06-639C-BD765AD66F51}"/>
+                <a16:creationId xmlns:a16="http://schemas.microsoft.com/office/drawing/2014/main" id="{44AA0500-09B2-0C6D-85ED-84D56B020DEB}"/>
               </a:ext>
             </a:extLst>
           </p:cNvPr>
@@ -4139,7 +4142,7 @@
             <a:hlinkClick r:id="" action="ppaction://media"/>
             <a:extLst>
               <a:ext uri="{FF2B5EF4-FFF2-40B4-BE49-F238E27FC236}">
-                <a16:creationId xmlns:a16="http://schemas.microsoft.com/office/drawing/2014/main" id="{C5F8626D-6009-1F9B-EDD2-82FE6F7A799C}"/>
+                <a16:creationId xmlns:a16="http://schemas.microsoft.com/office/drawing/2014/main" id="{F98096F8-8B3C-E2A3-74ED-372F4717B5F2}"/>
               </a:ext>
             </a:extLst>
           </p:cNvPr>
@@ -4174,7 +4177,7 @@
     </p:spTree>
     <p:extLst>
       <p:ext uri="{BB962C8B-B14F-4D97-AF65-F5344CB8AC3E}">
-        <p14:creationId xmlns:p14="http://schemas.microsoft.com/office/powerpoint/2010/main" val="3265604253"/>
+        <p14:creationId xmlns:p14="http://schemas.microsoft.com/office/powerpoint/2010/main" val="641865375"/>
       </p:ext>
     </p:extLst>
   </p:cSld>
@@ -4183,10 +4186,10 @@
   </p:clrMapOvr>
   <mc:AlternateContent xmlns:mc="http://schemas.openxmlformats.org/markup-compatibility/2006">
     <mc:Choice xmlns:p14="http://schemas.microsoft.com/office/powerpoint/2010/main" Requires="p14">
-      <p:transition spd="slow" p14:dur="2000" advTm="10000"/>
+      <p:transition spd="slow" p14:dur="2000" advTm="8000"/>
     </mc:Choice>
     <mc:Fallback>
-      <p:transition spd="slow" advTm="10000"/>
+      <p:transition spd="slow" advTm="8000"/>
     </mc:Fallback>
   </mc:AlternateContent>
   <p:timing>
@@ -4217,7 +4220,7 @@
                                   <p:childTnLst>
                                     <p:cmd type="call" cmd="playFrom(0.0)">
                                       <p:cBhvr>
-                                        <p:cTn id="6" dur="9895" fill="hold"/>
+                                        <p:cTn id="6" dur="7331" fill="hold"/>
                                         <p:tgtEl>
                                           <p:spTgt spid="6"/>
                                         </p:tgtEl>
@@ -4298,7 +4301,7 @@
           <p:cNvPr id="2" name="テキスト ボックス 1">
             <a:extLst>
               <a:ext uri="{FF2B5EF4-FFF2-40B4-BE49-F238E27FC236}">
-                <a16:creationId xmlns:a16="http://schemas.microsoft.com/office/drawing/2014/main" id="{FFCD0131-B305-91C2-C843-41C93388E4FE}"/>
+                <a16:creationId xmlns:a16="http://schemas.microsoft.com/office/drawing/2014/main" id="{EFBDEB9E-31ED-BFDF-604F-AA2F6A23B13A}"/>
               </a:ext>
             </a:extLst>
           </p:cNvPr>
@@ -4344,7 +4347,7 @@
           <p:cNvPr id="3" name="テキスト ボックス 2">
             <a:extLst>
               <a:ext uri="{FF2B5EF4-FFF2-40B4-BE49-F238E27FC236}">
-                <a16:creationId xmlns:a16="http://schemas.microsoft.com/office/drawing/2014/main" id="{C994483B-BFDF-6226-6EFF-8E73B21F0915}"/>
+                <a16:creationId xmlns:a16="http://schemas.microsoft.com/office/drawing/2014/main" id="{89158AD9-6F2E-5844-5118-24431864ED46}"/>
               </a:ext>
             </a:extLst>
           </p:cNvPr>
@@ -4384,7 +4387,7 @@
           <p:cNvPr id="4" name="テキスト ボックス 3">
             <a:extLst>
               <a:ext uri="{FF2B5EF4-FFF2-40B4-BE49-F238E27FC236}">
-                <a16:creationId xmlns:a16="http://schemas.microsoft.com/office/drawing/2014/main" id="{0A319EB5-9828-7572-2E42-82BDCEA0A40F}"/>
+                <a16:creationId xmlns:a16="http://schemas.microsoft.com/office/drawing/2014/main" id="{5EB46C34-6D2B-AAA1-A5AC-8D0DB7F2E46F}"/>
               </a:ext>
             </a:extLst>
           </p:cNvPr>
@@ -4479,7 +4482,7 @@
           <p:cNvPr id="5" name="テキスト ボックス 4">
             <a:extLst>
               <a:ext uri="{FF2B5EF4-FFF2-40B4-BE49-F238E27FC236}">
-                <a16:creationId xmlns:a16="http://schemas.microsoft.com/office/drawing/2014/main" id="{C7A3E3E0-CA49-6E89-2B0A-93E1A8DD09B4}"/>
+                <a16:creationId xmlns:a16="http://schemas.microsoft.com/office/drawing/2014/main" id="{EEEFCF8C-9FFB-3E7F-0E70-1093D283AE5B}"/>
               </a:ext>
             </a:extLst>
           </p:cNvPr>
@@ -4526,7 +4529,7 @@
             <a:hlinkClick r:id="" action="ppaction://media"/>
             <a:extLst>
               <a:ext uri="{FF2B5EF4-FFF2-40B4-BE49-F238E27FC236}">
-                <a16:creationId xmlns:a16="http://schemas.microsoft.com/office/drawing/2014/main" id="{95249456-2F0E-7DC8-4EDE-E992151E8525}"/>
+                <a16:creationId xmlns:a16="http://schemas.microsoft.com/office/drawing/2014/main" id="{F86D3D5D-1AB6-FACA-509E-4E00B98CBA0B}"/>
               </a:ext>
             </a:extLst>
           </p:cNvPr>
@@ -4561,7 +4564,7 @@
     </p:spTree>
     <p:extLst>
       <p:ext uri="{BB962C8B-B14F-4D97-AF65-F5344CB8AC3E}">
-        <p14:creationId xmlns:p14="http://schemas.microsoft.com/office/powerpoint/2010/main" val="2638649598"/>
+        <p14:creationId xmlns:p14="http://schemas.microsoft.com/office/powerpoint/2010/main" val="648812409"/>
       </p:ext>
     </p:extLst>
   </p:cSld>
@@ -4685,7 +4688,7 @@
           <p:cNvPr id="2" name="テキスト ボックス 1">
             <a:extLst>
               <a:ext uri="{FF2B5EF4-FFF2-40B4-BE49-F238E27FC236}">
-                <a16:creationId xmlns:a16="http://schemas.microsoft.com/office/drawing/2014/main" id="{34A19811-4ED5-CEE3-053A-94BDF339F6B0}"/>
+                <a16:creationId xmlns:a16="http://schemas.microsoft.com/office/drawing/2014/main" id="{C2A10591-8E7D-7689-A351-BAE80000EEE1}"/>
               </a:ext>
             </a:extLst>
           </p:cNvPr>
@@ -4731,7 +4734,7 @@
           <p:cNvPr id="3" name="テキスト ボックス 2">
             <a:extLst>
               <a:ext uri="{FF2B5EF4-FFF2-40B4-BE49-F238E27FC236}">
-                <a16:creationId xmlns:a16="http://schemas.microsoft.com/office/drawing/2014/main" id="{EAA0D6C7-68B3-2D0A-20A2-AAD5B83C7C42}"/>
+                <a16:creationId xmlns:a16="http://schemas.microsoft.com/office/drawing/2014/main" id="{79CD73FF-5210-C9BC-369A-32C211CA9DFF}"/>
               </a:ext>
             </a:extLst>
           </p:cNvPr>
@@ -4771,7 +4774,7 @@
           <p:cNvPr id="4" name="テキスト ボックス 3">
             <a:extLst>
               <a:ext uri="{FF2B5EF4-FFF2-40B4-BE49-F238E27FC236}">
-                <a16:creationId xmlns:a16="http://schemas.microsoft.com/office/drawing/2014/main" id="{71AA9F81-2D50-E111-E17A-CCC3CCF0A6CB}"/>
+                <a16:creationId xmlns:a16="http://schemas.microsoft.com/office/drawing/2014/main" id="{D20BE61C-E834-8C3C-FA4F-CC0956E8163C}"/>
               </a:ext>
             </a:extLst>
           </p:cNvPr>
@@ -4881,7 +4884,7 @@
           <p:cNvPr id="5" name="テキスト ボックス 4">
             <a:extLst>
               <a:ext uri="{FF2B5EF4-FFF2-40B4-BE49-F238E27FC236}">
-                <a16:creationId xmlns:a16="http://schemas.microsoft.com/office/drawing/2014/main" id="{8A885BCE-84F6-E208-BCCC-EA298B70058C}"/>
+                <a16:creationId xmlns:a16="http://schemas.microsoft.com/office/drawing/2014/main" id="{9EAB498F-25A7-7881-2105-E7766F560D05}"/>
               </a:ext>
             </a:extLst>
           </p:cNvPr>
@@ -4928,7 +4931,7 @@
             <a:hlinkClick r:id="" action="ppaction://media"/>
             <a:extLst>
               <a:ext uri="{FF2B5EF4-FFF2-40B4-BE49-F238E27FC236}">
-                <a16:creationId xmlns:a16="http://schemas.microsoft.com/office/drawing/2014/main" id="{2A24910A-87F0-3CCB-6F64-9E4DF8F36F97}"/>
+                <a16:creationId xmlns:a16="http://schemas.microsoft.com/office/drawing/2014/main" id="{FD34DABF-EAF0-7A35-7088-8C6B49509131}"/>
               </a:ext>
             </a:extLst>
           </p:cNvPr>
@@ -4963,7 +4966,7 @@
     </p:spTree>
     <p:extLst>
       <p:ext uri="{BB962C8B-B14F-4D97-AF65-F5344CB8AC3E}">
-        <p14:creationId xmlns:p14="http://schemas.microsoft.com/office/powerpoint/2010/main" val="3731876038"/>
+        <p14:creationId xmlns:p14="http://schemas.microsoft.com/office/powerpoint/2010/main" val="594937091"/>
       </p:ext>
     </p:extLst>
   </p:cSld>
@@ -5087,7 +5090,7 @@
           <p:cNvPr id="2" name="テキスト ボックス 1">
             <a:extLst>
               <a:ext uri="{FF2B5EF4-FFF2-40B4-BE49-F238E27FC236}">
-                <a16:creationId xmlns:a16="http://schemas.microsoft.com/office/drawing/2014/main" id="{85D0C122-3003-9162-1F4A-04A41EECE2DD}"/>
+                <a16:creationId xmlns:a16="http://schemas.microsoft.com/office/drawing/2014/main" id="{3C06A7F7-B4AC-77B5-66EF-C50660BBC30B}"/>
               </a:ext>
             </a:extLst>
           </p:cNvPr>
@@ -5133,7 +5136,7 @@
           <p:cNvPr id="3" name="テキスト ボックス 2">
             <a:extLst>
               <a:ext uri="{FF2B5EF4-FFF2-40B4-BE49-F238E27FC236}">
-                <a16:creationId xmlns:a16="http://schemas.microsoft.com/office/drawing/2014/main" id="{0574D7AA-AF1C-EE08-DCBF-A56EA64AADE8}"/>
+                <a16:creationId xmlns:a16="http://schemas.microsoft.com/office/drawing/2014/main" id="{B62C0962-3F8D-0A6F-EEEA-3C8F6118D5DD}"/>
               </a:ext>
             </a:extLst>
           </p:cNvPr>
@@ -5173,7 +5176,7 @@
           <p:cNvPr id="4" name="テキスト ボックス 3">
             <a:extLst>
               <a:ext uri="{FF2B5EF4-FFF2-40B4-BE49-F238E27FC236}">
-                <a16:creationId xmlns:a16="http://schemas.microsoft.com/office/drawing/2014/main" id="{40710F04-977D-03C0-0AFD-2D9CBCFAC382}"/>
+                <a16:creationId xmlns:a16="http://schemas.microsoft.com/office/drawing/2014/main" id="{E9925B78-9B1F-2FD8-FC3F-963F515A7E6A}"/>
               </a:ext>
             </a:extLst>
           </p:cNvPr>
@@ -5197,20 +5200,14 @@
           <a:lstStyle/>
           <a:p>
             <a:r>
-              <a:rPr kumimoji="1" lang="en-US" altLang="ja-JP" sz="2000">
+              <a:rPr kumimoji="1" lang="ja-JP" altLang="en-US" sz="2000">
                 <a:solidFill>
                   <a:srgbClr val="333333"/>
                 </a:solidFill>
                 <a:latin typeface="Arial" panose="020B0604020202020204" pitchFamily="34" charset="0"/>
               </a:rPr>
-              <a:t>Set confirmed custom domain</a:t>
-            </a:r>
-            <a:endParaRPr kumimoji="1" lang="ja-JP" altLang="en-US" sz="2000">
-              <a:solidFill>
-                <a:srgbClr val="333333"/>
-              </a:solidFill>
-              <a:latin typeface="Arial" panose="020B0604020202020204" pitchFamily="34" charset="0"/>
-            </a:endParaRPr>
+              <a:t>直近のコミットでは、実装の見直しと継続的な改善が行われました。</a:t>
+            </a:r>
           </a:p>
         </p:txBody>
       </p:sp>
@@ -5219,7 +5216,7 @@
           <p:cNvPr id="5" name="テキスト ボックス 4">
             <a:extLst>
               <a:ext uri="{FF2B5EF4-FFF2-40B4-BE49-F238E27FC236}">
-                <a16:creationId xmlns:a16="http://schemas.microsoft.com/office/drawing/2014/main" id="{61DCA332-4EBB-F895-1570-296EEB5C0946}"/>
+                <a16:creationId xmlns:a16="http://schemas.microsoft.com/office/drawing/2014/main" id="{E4A0C4EA-E852-660D-2C86-9397F6D14704}"/>
               </a:ext>
             </a:extLst>
           </p:cNvPr>
@@ -5266,7 +5263,7 @@
             <a:hlinkClick r:id="" action="ppaction://media"/>
             <a:extLst>
               <a:ext uri="{FF2B5EF4-FFF2-40B4-BE49-F238E27FC236}">
-                <a16:creationId xmlns:a16="http://schemas.microsoft.com/office/drawing/2014/main" id="{7CC9D2F7-26AD-CA66-0117-0CE28336334E}"/>
+                <a16:creationId xmlns:a16="http://schemas.microsoft.com/office/drawing/2014/main" id="{32E564A9-A72D-1977-D5F2-54FF286F6830}"/>
               </a:ext>
             </a:extLst>
           </p:cNvPr>
@@ -5301,7 +5298,7 @@
     </p:spTree>
     <p:extLst>
       <p:ext uri="{BB962C8B-B14F-4D97-AF65-F5344CB8AC3E}">
-        <p14:creationId xmlns:p14="http://schemas.microsoft.com/office/powerpoint/2010/main" val="3278055352"/>
+        <p14:creationId xmlns:p14="http://schemas.microsoft.com/office/powerpoint/2010/main" val="760453570"/>
       </p:ext>
     </p:extLst>
   </p:cSld>
@@ -5344,7 +5341,7 @@
                                   <p:childTnLst>
                                     <p:cmd type="call" cmd="playFrom(0.0)">
                                       <p:cBhvr>
-                                        <p:cTn id="6" dur="6451" fill="hold"/>
+                                        <p:cTn id="6" dur="6076" fill="hold"/>
                                         <p:tgtEl>
                                           <p:spTgt spid="6"/>
                                         </p:tgtEl>
@@ -5425,7 +5422,7 @@
           <p:cNvPr id="2" name="テキスト ボックス 1">
             <a:extLst>
               <a:ext uri="{FF2B5EF4-FFF2-40B4-BE49-F238E27FC236}">
-                <a16:creationId xmlns:a16="http://schemas.microsoft.com/office/drawing/2014/main" id="{269C717C-63AF-D5AA-E24C-BCDC0AD861BA}"/>
+                <a16:creationId xmlns:a16="http://schemas.microsoft.com/office/drawing/2014/main" id="{E4C0F3F6-4809-0E48-DAFA-43AE5447A9CF}"/>
               </a:ext>
             </a:extLst>
           </p:cNvPr>
@@ -5471,7 +5468,7 @@
           <p:cNvPr id="3" name="テキスト ボックス 2">
             <a:extLst>
               <a:ext uri="{FF2B5EF4-FFF2-40B4-BE49-F238E27FC236}">
-                <a16:creationId xmlns:a16="http://schemas.microsoft.com/office/drawing/2014/main" id="{61BACAFA-E4E2-5B76-913E-44546055E572}"/>
+                <a16:creationId xmlns:a16="http://schemas.microsoft.com/office/drawing/2014/main" id="{1A43994E-9F47-6746-DB2C-14DE7F1D94BC}"/>
               </a:ext>
             </a:extLst>
           </p:cNvPr>
@@ -5511,7 +5508,7 @@
           <p:cNvPr id="4" name="テキスト ボックス 3">
             <a:extLst>
               <a:ext uri="{FF2B5EF4-FFF2-40B4-BE49-F238E27FC236}">
-                <a16:creationId xmlns:a16="http://schemas.microsoft.com/office/drawing/2014/main" id="{5819238F-00AC-1EDE-F403-84BA1C4B6F55}"/>
+                <a16:creationId xmlns:a16="http://schemas.microsoft.com/office/drawing/2014/main" id="{8B5809C3-1CB8-C8E7-9819-45645023552D}"/>
               </a:ext>
             </a:extLst>
           </p:cNvPr>
@@ -5576,7 +5573,7 @@
           <p:cNvPr id="5" name="テキスト ボックス 4">
             <a:extLst>
               <a:ext uri="{FF2B5EF4-FFF2-40B4-BE49-F238E27FC236}">
-                <a16:creationId xmlns:a16="http://schemas.microsoft.com/office/drawing/2014/main" id="{B0703C91-E1ED-6067-2996-2FC8F2E6E73B}"/>
+                <a16:creationId xmlns:a16="http://schemas.microsoft.com/office/drawing/2014/main" id="{C189933E-AEF9-0281-13B1-5BCF0A4D8D25}"/>
               </a:ext>
             </a:extLst>
           </p:cNvPr>
@@ -5623,7 +5620,7 @@
             <a:hlinkClick r:id="" action="ppaction://media"/>
             <a:extLst>
               <a:ext uri="{FF2B5EF4-FFF2-40B4-BE49-F238E27FC236}">
-                <a16:creationId xmlns:a16="http://schemas.microsoft.com/office/drawing/2014/main" id="{82DFAD92-8215-52BB-9003-86DC84B9A79D}"/>
+                <a16:creationId xmlns:a16="http://schemas.microsoft.com/office/drawing/2014/main" id="{4EDC91EC-2A05-39CE-BF53-853BCBCBB577}"/>
               </a:ext>
             </a:extLst>
           </p:cNvPr>
@@ -5658,7 +5655,7 @@
     </p:spTree>
     <p:extLst>
       <p:ext uri="{BB962C8B-B14F-4D97-AF65-F5344CB8AC3E}">
-        <p14:creationId xmlns:p14="http://schemas.microsoft.com/office/powerpoint/2010/main" val="3616988147"/>
+        <p14:creationId xmlns:p14="http://schemas.microsoft.com/office/powerpoint/2010/main" val="3270327509"/>
       </p:ext>
     </p:extLst>
   </p:cSld>
